--- a/content/lessons/ionic-bonding/btec-unit-1-chemistry-ionic-bonding.pptx
+++ b/content/lessons/ionic-bonding/btec-unit-1-chemistry-ionic-bonding.pptx
@@ -8462,8 +8462,8 @@
         </p:nvSpPr>
         <p:spPr>
           <a:xfrm>
-            <a:off x="0" y="2880360"/>
-            <a:ext cx="12191695" cy="73152"/>
+            <a:off x="0" y="0"/>
+            <a:ext cx="146304" cy="6858000"/>
           </a:xfrm>
           <a:prstGeom prst="rect">
             <a:avLst/>
@@ -8505,8 +8505,160 @@
         </p:nvSpPr>
         <p:spPr>
           <a:xfrm>
+            <a:off x="640080" y="384048"/>
+            <a:ext cx="10972800" cy="868680"/>
+          </a:xfrm>
+          <a:prstGeom prst="rect">
+            <a:avLst/>
+          </a:prstGeom>
+          <a:noFill/>
+        </p:spPr>
+        <p:txBody>
+          <a:bodyPr wrap="square" anchor="t"/>
+          <a:lstStyle/>
+          <a:p>
+            <a:pPr algn="l"/>
+            <a:r>
+              <a:rPr sz="3000" b="1" i="0" a:ea="Calibri">
+                <a:solidFill>
+                  <a:srgbClr val="FFFFFF"/>
+                </a:solidFill>
+                <a:latin typeface="Calibri"/>
+              </a:rPr>
+              <a:t>The giant ionic lattice</a:t>
+            </a:r>
+          </a:p>
+        </p:txBody>
+      </p:sp>
+      <p:sp>
+        <p:nvSpPr>
+          <p:cNvPr id="5" name="TextBox 4"/>
+          <p:cNvSpPr txBox="1"/>
+          <p:nvPr/>
+        </p:nvSpPr>
+        <p:spPr>
+          <a:xfrm>
+            <a:off x="640080" y="1261872"/>
+            <a:ext cx="10972800" cy="502920"/>
+          </a:xfrm>
+          <a:prstGeom prst="rect">
+            <a:avLst/>
+          </a:prstGeom>
+          <a:noFill/>
+        </p:spPr>
+        <p:txBody>
+          <a:bodyPr wrap="square" anchor="t"/>
+          <a:lstStyle/>
+          <a:p>
+            <a:pPr algn="l"/>
+            <a:r>
+              <a:rPr sz="1700" b="0" i="0" a:ea="Calibri">
+                <a:solidFill>
+                  <a:srgbClr val="CCFBF1"/>
+                </a:solidFill>
+                <a:latin typeface="Calibri"/>
+              </a:rPr>
+              <a:t>Structure explains properties</a:t>
+            </a:r>
+          </a:p>
+        </p:txBody>
+      </p:sp>
+      <p:sp>
+        <p:nvSpPr>
+          <p:cNvPr id="6" name="Rounded Rectangle 5"/>
+          <p:cNvSpPr/>
+          <p:nvPr/>
+        </p:nvSpPr>
+        <p:spPr>
+          <a:xfrm>
             <a:off x="640080" y="1965960"/>
-            <a:ext cx="10881360" cy="914400"/>
+            <a:ext cx="3520440" cy="3977639"/>
+          </a:xfrm>
+          <a:prstGeom prst="roundRect">
+            <a:avLst/>
+          </a:prstGeom>
+          <a:solidFill>
+            <a:srgbClr val="003D33"/>
+          </a:solidFill>
+          <a:ln>
+            <a:noFill/>
+          </a:ln>
+        </p:spPr>
+        <p:style>
+          <a:lnRef idx="1">
+            <a:schemeClr val="accent1"/>
+          </a:lnRef>
+          <a:fillRef idx="3">
+            <a:schemeClr val="accent1"/>
+          </a:fillRef>
+          <a:effectRef idx="2">
+            <a:schemeClr val="accent1"/>
+          </a:effectRef>
+          <a:fontRef idx="minor">
+            <a:schemeClr val="lt1"/>
+          </a:fontRef>
+        </p:style>
+        <p:txBody>
+          <a:bodyPr rtlCol="0" anchor="ctr"/>
+          <a:lstStyle/>
+          <a:p>
+            <a:pPr algn="ctr"/>
+          </a:p>
+        </p:txBody>
+      </p:sp>
+      <p:sp>
+        <p:nvSpPr>
+          <p:cNvPr id="7" name="Rectangle 6"/>
+          <p:cNvSpPr/>
+          <p:nvPr/>
+        </p:nvSpPr>
+        <p:spPr>
+          <a:xfrm>
+            <a:off x="640080" y="1965960"/>
+            <a:ext cx="3520440" cy="109728"/>
+          </a:xfrm>
+          <a:prstGeom prst="rect">
+            <a:avLst/>
+          </a:prstGeom>
+          <a:solidFill>
+            <a:srgbClr val="009688"/>
+          </a:solidFill>
+          <a:ln>
+            <a:noFill/>
+          </a:ln>
+        </p:spPr>
+        <p:style>
+          <a:lnRef idx="1">
+            <a:schemeClr val="accent1"/>
+          </a:lnRef>
+          <a:fillRef idx="3">
+            <a:schemeClr val="accent1"/>
+          </a:fillRef>
+          <a:effectRef idx="2">
+            <a:schemeClr val="accent1"/>
+          </a:effectRef>
+          <a:fontRef idx="minor">
+            <a:schemeClr val="lt1"/>
+          </a:fontRef>
+        </p:style>
+        <p:txBody>
+          <a:bodyPr rtlCol="0" anchor="ctr"/>
+          <a:lstStyle/>
+          <a:p>
+            <a:pPr algn="ctr"/>
+          </a:p>
+        </p:txBody>
+      </p:sp>
+      <p:sp>
+        <p:nvSpPr>
+          <p:cNvPr id="8" name="TextBox 7"/>
+          <p:cNvSpPr txBox="1"/>
+          <p:nvPr/>
+        </p:nvSpPr>
+        <p:spPr>
+          <a:xfrm>
+            <a:off x="841248" y="2212848"/>
+            <a:ext cx="3108960" cy="457200"/>
           </a:xfrm>
           <a:prstGeom prst="rect">
             <a:avLst/>
@@ -8519,27 +8671,146 @@
           <a:p>
             <a:pPr algn="l"/>
             <a:r>
-              <a:rPr sz="3400" b="1" i="0" a:ea="Calibri">
+              <a:rPr sz="1600" b="1" i="0" a:ea="Calibri">
+                <a:solidFill>
+                  <a:srgbClr val="CCFBF1"/>
+                </a:solidFill>
+                <a:latin typeface="Calibri"/>
+              </a:rPr>
+              <a:t>1   Look for</a:t>
+            </a:r>
+          </a:p>
+        </p:txBody>
+      </p:sp>
+      <p:sp>
+        <p:nvSpPr>
+          <p:cNvPr id="9" name="TextBox 8"/>
+          <p:cNvSpPr txBox="1"/>
+          <p:nvPr/>
+        </p:nvSpPr>
+        <p:spPr>
+          <a:xfrm>
+            <a:off x="841248" y="2788920"/>
+            <a:ext cx="3108960" cy="2880360"/>
+          </a:xfrm>
+          <a:prstGeom prst="rect">
+            <a:avLst/>
+          </a:prstGeom>
+          <a:noFill/>
+        </p:spPr>
+        <p:txBody>
+          <a:bodyPr wrap="square" anchor="t"/>
+          <a:lstStyle/>
+          <a:p>
+            <a:pPr algn="l"/>
+            <a:r>
+              <a:rPr sz="1600" b="0" i="0" a:ea="Calibri">
                 <a:solidFill>
                   <a:srgbClr val="FFFFFF"/>
                 </a:solidFill>
                 <a:latin typeface="Calibri"/>
               </a:rPr>
-              <a:t>The giant ionic lattice</a:t>
-            </a:r>
-          </a:p>
-        </p:txBody>
-      </p:sp>
-      <p:sp>
-        <p:nvSpPr>
-          <p:cNvPr id="5" name="TextBox 4"/>
-          <p:cNvSpPr txBox="1"/>
-          <p:nvPr/>
-        </p:nvSpPr>
-        <p:spPr>
-          <a:xfrm>
-            <a:off x="640080" y="3154680"/>
-            <a:ext cx="10881360" cy="822960"/>
+              <a:t>Alternating cations and anions in every direction.</a:t>
+            </a:r>
+          </a:p>
+        </p:txBody>
+      </p:sp>
+      <p:sp>
+        <p:nvSpPr>
+          <p:cNvPr id="10" name="Rounded Rectangle 9"/>
+          <p:cNvSpPr/>
+          <p:nvPr/>
+        </p:nvSpPr>
+        <p:spPr>
+          <a:xfrm>
+            <a:off x="4343400" y="1965960"/>
+            <a:ext cx="3520440" cy="3977639"/>
+          </a:xfrm>
+          <a:prstGeom prst="roundRect">
+            <a:avLst/>
+          </a:prstGeom>
+          <a:solidFill>
+            <a:srgbClr val="003D33"/>
+          </a:solidFill>
+          <a:ln>
+            <a:noFill/>
+          </a:ln>
+        </p:spPr>
+        <p:style>
+          <a:lnRef idx="1">
+            <a:schemeClr val="accent1"/>
+          </a:lnRef>
+          <a:fillRef idx="3">
+            <a:schemeClr val="accent1"/>
+          </a:fillRef>
+          <a:effectRef idx="2">
+            <a:schemeClr val="accent1"/>
+          </a:effectRef>
+          <a:fontRef idx="minor">
+            <a:schemeClr val="lt1"/>
+          </a:fontRef>
+        </p:style>
+        <p:txBody>
+          <a:bodyPr rtlCol="0" anchor="ctr"/>
+          <a:lstStyle/>
+          <a:p>
+            <a:pPr algn="ctr"/>
+          </a:p>
+        </p:txBody>
+      </p:sp>
+      <p:sp>
+        <p:nvSpPr>
+          <p:cNvPr id="11" name="Rectangle 10"/>
+          <p:cNvSpPr/>
+          <p:nvPr/>
+        </p:nvSpPr>
+        <p:spPr>
+          <a:xfrm>
+            <a:off x="4343400" y="1965960"/>
+            <a:ext cx="3520440" cy="109728"/>
+          </a:xfrm>
+          <a:prstGeom prst="rect">
+            <a:avLst/>
+          </a:prstGeom>
+          <a:solidFill>
+            <a:srgbClr val="99F6E4"/>
+          </a:solidFill>
+          <a:ln>
+            <a:noFill/>
+          </a:ln>
+        </p:spPr>
+        <p:style>
+          <a:lnRef idx="1">
+            <a:schemeClr val="accent1"/>
+          </a:lnRef>
+          <a:fillRef idx="3">
+            <a:schemeClr val="accent1"/>
+          </a:fillRef>
+          <a:effectRef idx="2">
+            <a:schemeClr val="accent1"/>
+          </a:effectRef>
+          <a:fontRef idx="minor">
+            <a:schemeClr val="lt1"/>
+          </a:fontRef>
+        </p:style>
+        <p:txBody>
+          <a:bodyPr rtlCol="0" anchor="ctr"/>
+          <a:lstStyle/>
+          <a:p>
+            <a:pPr algn="ctr"/>
+          </a:p>
+        </p:txBody>
+      </p:sp>
+      <p:sp>
+        <p:nvSpPr>
+          <p:cNvPr id="12" name="TextBox 11"/>
+          <p:cNvSpPr txBox="1"/>
+          <p:nvPr/>
+        </p:nvSpPr>
+        <p:spPr>
+          <a:xfrm>
+            <a:off x="4544568" y="2212848"/>
+            <a:ext cx="3108960" cy="457200"/>
           </a:xfrm>
           <a:prstGeom prst="rect">
             <a:avLst/>
@@ -8552,20 +8823,205 @@
           <a:p>
             <a:pPr algn="l"/>
             <a:r>
-              <a:rPr sz="1800" b="0" i="0" a:ea="Calibri">
+              <a:rPr sz="1600" b="1" i="0" a:ea="Calibri">
                 <a:solidFill>
                   <a:srgbClr val="CCFBF1"/>
                 </a:solidFill>
                 <a:latin typeface="Calibri"/>
               </a:rPr>
-              <a:t>Structure explains properties</a:t>
-            </a:r>
-          </a:p>
-        </p:txBody>
-      </p:sp>
-      <p:sp>
-        <p:nvSpPr>
-          <p:cNvPr id="6" name="Rectangle 5"/>
+              <a:t>2   Say in full</a:t>
+            </a:r>
+          </a:p>
+        </p:txBody>
+      </p:sp>
+      <p:sp>
+        <p:nvSpPr>
+          <p:cNvPr id="13" name="TextBox 12"/>
+          <p:cNvSpPr txBox="1"/>
+          <p:nvPr/>
+        </p:nvSpPr>
+        <p:spPr>
+          <a:xfrm>
+            <a:off x="4544568" y="2788920"/>
+            <a:ext cx="3108960" cy="2880360"/>
+          </a:xfrm>
+          <a:prstGeom prst="rect">
+            <a:avLst/>
+          </a:prstGeom>
+          <a:noFill/>
+        </p:spPr>
+        <p:txBody>
+          <a:bodyPr wrap="square" anchor="t"/>
+          <a:lstStyle/>
+          <a:p>
+            <a:pPr algn="l"/>
+            <a:r>
+              <a:rPr sz="1600" b="0" i="0" a:ea="Calibri">
+                <a:solidFill>
+                  <a:srgbClr val="FFFFFF"/>
+                </a:solidFill>
+                <a:latin typeface="Calibri"/>
+              </a:rPr>
+              <a:t>Strong attraction throughout the crystal needs a lot of energy to overcome.</a:t>
+            </a:r>
+          </a:p>
+        </p:txBody>
+      </p:sp>
+      <p:sp>
+        <p:nvSpPr>
+          <p:cNvPr id="14" name="Rounded Rectangle 13"/>
+          <p:cNvSpPr/>
+          <p:nvPr/>
+        </p:nvSpPr>
+        <p:spPr>
+          <a:xfrm>
+            <a:off x="8046720" y="1965960"/>
+            <a:ext cx="3520440" cy="3977639"/>
+          </a:xfrm>
+          <a:prstGeom prst="roundRect">
+            <a:avLst/>
+          </a:prstGeom>
+          <a:solidFill>
+            <a:srgbClr val="003D33"/>
+          </a:solidFill>
+          <a:ln>
+            <a:noFill/>
+          </a:ln>
+        </p:spPr>
+        <p:style>
+          <a:lnRef idx="1">
+            <a:schemeClr val="accent1"/>
+          </a:lnRef>
+          <a:fillRef idx="3">
+            <a:schemeClr val="accent1"/>
+          </a:fillRef>
+          <a:effectRef idx="2">
+            <a:schemeClr val="accent1"/>
+          </a:effectRef>
+          <a:fontRef idx="minor">
+            <a:schemeClr val="lt1"/>
+          </a:fontRef>
+        </p:style>
+        <p:txBody>
+          <a:bodyPr rtlCol="0" anchor="ctr"/>
+          <a:lstStyle/>
+          <a:p>
+            <a:pPr algn="ctr"/>
+          </a:p>
+        </p:txBody>
+      </p:sp>
+      <p:sp>
+        <p:nvSpPr>
+          <p:cNvPr id="15" name="Rectangle 14"/>
+          <p:cNvSpPr/>
+          <p:nvPr/>
+        </p:nvSpPr>
+        <p:spPr>
+          <a:xfrm>
+            <a:off x="8046720" y="1965960"/>
+            <a:ext cx="3520440" cy="109728"/>
+          </a:xfrm>
+          <a:prstGeom prst="rect">
+            <a:avLst/>
+          </a:prstGeom>
+          <a:solidFill>
+            <a:srgbClr val="5EEAD4"/>
+          </a:solidFill>
+          <a:ln>
+            <a:noFill/>
+          </a:ln>
+        </p:spPr>
+        <p:style>
+          <a:lnRef idx="1">
+            <a:schemeClr val="accent1"/>
+          </a:lnRef>
+          <a:fillRef idx="3">
+            <a:schemeClr val="accent1"/>
+          </a:fillRef>
+          <a:effectRef idx="2">
+            <a:schemeClr val="accent1"/>
+          </a:effectRef>
+          <a:fontRef idx="minor">
+            <a:schemeClr val="lt1"/>
+          </a:fontRef>
+        </p:style>
+        <p:txBody>
+          <a:bodyPr rtlCol="0" anchor="ctr"/>
+          <a:lstStyle/>
+          <a:p>
+            <a:pPr algn="ctr"/>
+          </a:p>
+        </p:txBody>
+      </p:sp>
+      <p:sp>
+        <p:nvSpPr>
+          <p:cNvPr id="16" name="TextBox 15"/>
+          <p:cNvSpPr txBox="1"/>
+          <p:nvPr/>
+        </p:nvSpPr>
+        <p:spPr>
+          <a:xfrm>
+            <a:off x="8247888" y="2212848"/>
+            <a:ext cx="3108960" cy="457200"/>
+          </a:xfrm>
+          <a:prstGeom prst="rect">
+            <a:avLst/>
+          </a:prstGeom>
+          <a:noFill/>
+        </p:spPr>
+        <p:txBody>
+          <a:bodyPr wrap="square" anchor="t"/>
+          <a:lstStyle/>
+          <a:p>
+            <a:pPr algn="l"/>
+            <a:r>
+              <a:rPr sz="1600" b="1" i="0" a:ea="Calibri">
+                <a:solidFill>
+                  <a:srgbClr val="CCFBF1"/>
+                </a:solidFill>
+                <a:latin typeface="Calibri"/>
+              </a:rPr>
+              <a:t>3   Level 3 move</a:t>
+            </a:r>
+          </a:p>
+        </p:txBody>
+      </p:sp>
+      <p:sp>
+        <p:nvSpPr>
+          <p:cNvPr id="17" name="TextBox 16"/>
+          <p:cNvSpPr txBox="1"/>
+          <p:nvPr/>
+        </p:nvSpPr>
+        <p:spPr>
+          <a:xfrm>
+            <a:off x="8247888" y="2788920"/>
+            <a:ext cx="3108960" cy="2880360"/>
+          </a:xfrm>
+          <a:prstGeom prst="rect">
+            <a:avLst/>
+          </a:prstGeom>
+          <a:noFill/>
+        </p:spPr>
+        <p:txBody>
+          <a:bodyPr wrap="square" anchor="t"/>
+          <a:lstStyle/>
+          <a:p>
+            <a:pPr algn="l"/>
+            <a:r>
+              <a:rPr sz="1600" b="0" i="0" a:ea="Calibri">
+                <a:solidFill>
+                  <a:srgbClr val="FFFFFF"/>
+                </a:solidFill>
+                <a:latin typeface="Calibri"/>
+              </a:rPr>
+              <a:t>Solid: ions fixed, no conduction. Molten/aqueous: mobile ions carry charge.</a:t>
+            </a:r>
+          </a:p>
+        </p:txBody>
+      </p:sp>
+      <p:sp>
+        <p:nvSpPr>
+          <p:cNvPr id="18" name="Rectangle 17"/>
           <p:cNvSpPr/>
           <p:nvPr/>
         </p:nvSpPr>
@@ -8608,7 +9064,7 @@
       </p:sp>
       <p:pic>
         <p:nvPicPr>
-          <p:cNvPr id="7" name="Picture 6" descr="jdscience-footer-logo.png"/>
+          <p:cNvPr id="19" name="Picture 18" descr="jdscience-footer-logo.png"/>
           <p:cNvPicPr>
             <a:picLocks noChangeAspect="1"/>
           </p:cNvPicPr>
@@ -8632,7 +9088,7 @@
       </p:pic>
       <p:sp>
         <p:nvSpPr>
-          <p:cNvPr id="8" name="TextBox 7"/>
+          <p:cNvPr id="20" name="TextBox 19"/>
           <p:cNvSpPr txBox="1"/>
           <p:nvPr/>
         </p:nvSpPr>
@@ -8665,7 +9121,7 @@
       </p:sp>
       <p:sp>
         <p:nvSpPr>
-          <p:cNvPr id="9" name="TextBox 8"/>
+          <p:cNvPr id="21" name="TextBox 20"/>
           <p:cNvSpPr txBox="1"/>
           <p:nvPr/>
         </p:nvSpPr>
@@ -8698,7 +9154,7 @@
       </p:sp>
       <p:sp>
         <p:nvSpPr>
-          <p:cNvPr id="10" name="TextBox 9"/>
+          <p:cNvPr id="22" name="TextBox 21"/>
           <p:cNvSpPr txBox="1"/>
           <p:nvPr/>
         </p:nvSpPr>
@@ -8856,7 +9312,7 @@
         <p:spPr>
           <a:xfrm>
             <a:off x="6675120" y="960120"/>
-            <a:ext cx="5029200" cy="1051560"/>
+            <a:ext cx="5029200" cy="1108710"/>
           </a:xfrm>
           <a:prstGeom prst="roundRect">
             <a:avLst/>
@@ -8899,7 +9355,7 @@
         <p:spPr>
           <a:xfrm>
             <a:off x="6675120" y="960120"/>
-            <a:ext cx="91440" cy="1051560"/>
+            <a:ext cx="91440" cy="1108710"/>
           </a:xfrm>
           <a:prstGeom prst="rect">
             <a:avLst/>
@@ -8941,8 +9397,8 @@
         </p:nvSpPr>
         <p:spPr>
           <a:xfrm>
-            <a:off x="6931152" y="1069848"/>
-            <a:ext cx="4617720" cy="868680"/>
+            <a:off x="6931152" y="1051560"/>
+            <a:ext cx="4617720" cy="962406"/>
           </a:xfrm>
           <a:prstGeom prst="rect">
             <a:avLst/>
@@ -8974,8 +9430,8 @@
         </p:nvSpPr>
         <p:spPr>
           <a:xfrm>
-            <a:off x="6675120" y="2103120"/>
-            <a:ext cx="5029200" cy="1051560"/>
+            <a:off x="6675120" y="2160270"/>
+            <a:ext cx="5029200" cy="1108710"/>
           </a:xfrm>
           <a:prstGeom prst="roundRect">
             <a:avLst/>
@@ -9017,8 +9473,8 @@
         </p:nvSpPr>
         <p:spPr>
           <a:xfrm>
-            <a:off x="6675120" y="2103120"/>
-            <a:ext cx="91440" cy="1051560"/>
+            <a:off x="6675120" y="2160270"/>
+            <a:ext cx="91440" cy="1108710"/>
           </a:xfrm>
           <a:prstGeom prst="rect">
             <a:avLst/>
@@ -9060,8 +9516,8 @@
         </p:nvSpPr>
         <p:spPr>
           <a:xfrm>
-            <a:off x="6931152" y="2212848"/>
-            <a:ext cx="4617720" cy="868680"/>
+            <a:off x="6931152" y="2251710"/>
+            <a:ext cx="4617720" cy="962406"/>
           </a:xfrm>
           <a:prstGeom prst="rect">
             <a:avLst/>
@@ -9093,8 +9549,8 @@
         </p:nvSpPr>
         <p:spPr>
           <a:xfrm>
-            <a:off x="6675120" y="3246120"/>
-            <a:ext cx="5029200" cy="1051560"/>
+            <a:off x="6675120" y="3360420"/>
+            <a:ext cx="5029200" cy="1108710"/>
           </a:xfrm>
           <a:prstGeom prst="roundRect">
             <a:avLst/>
@@ -9136,8 +9592,8 @@
         </p:nvSpPr>
         <p:spPr>
           <a:xfrm>
-            <a:off x="6675120" y="3246120"/>
-            <a:ext cx="91440" cy="1051560"/>
+            <a:off x="6675120" y="3360420"/>
+            <a:ext cx="91440" cy="1108710"/>
           </a:xfrm>
           <a:prstGeom prst="rect">
             <a:avLst/>
@@ -9179,8 +9635,8 @@
         </p:nvSpPr>
         <p:spPr>
           <a:xfrm>
-            <a:off x="6931152" y="3355848"/>
-            <a:ext cx="4617720" cy="868680"/>
+            <a:off x="6931152" y="3451860"/>
+            <a:ext cx="4617720" cy="962406"/>
           </a:xfrm>
           <a:prstGeom prst="rect">
             <a:avLst/>
@@ -9212,8 +9668,8 @@
         </p:nvSpPr>
         <p:spPr>
           <a:xfrm>
-            <a:off x="6675120" y="4389120"/>
-            <a:ext cx="5029200" cy="1051560"/>
+            <a:off x="6675120" y="4560570"/>
+            <a:ext cx="5029200" cy="1108710"/>
           </a:xfrm>
           <a:prstGeom prst="roundRect">
             <a:avLst/>
@@ -9255,8 +9711,8 @@
         </p:nvSpPr>
         <p:spPr>
           <a:xfrm>
-            <a:off x="6675120" y="4389120"/>
-            <a:ext cx="91440" cy="1051560"/>
+            <a:off x="6675120" y="4560570"/>
+            <a:ext cx="91440" cy="1108710"/>
           </a:xfrm>
           <a:prstGeom prst="rect">
             <a:avLst/>
@@ -9298,8 +9754,8 @@
         </p:nvSpPr>
         <p:spPr>
           <a:xfrm>
-            <a:off x="6931152" y="4498848"/>
-            <a:ext cx="4617720" cy="868680"/>
+            <a:off x="6931152" y="4652010"/>
+            <a:ext cx="4617720" cy="962406"/>
           </a:xfrm>
           <a:prstGeom prst="rect">
             <a:avLst/>
@@ -12723,7 +13179,7 @@
         <p:spPr>
           <a:xfrm>
             <a:off x="658368" y="2011680"/>
-            <a:ext cx="3249168" cy="3383280"/>
+            <a:ext cx="3249168" cy="1417320"/>
           </a:xfrm>
           <a:prstGeom prst="rect">
             <a:avLst/>
@@ -12749,7 +13205,212 @@
       </p:sp>
       <p:sp>
         <p:nvSpPr>
-          <p:cNvPr id="11" name="Rounded Rectangle 10"/>
+          <p:cNvPr id="11" name="TextBox 10"/>
+          <p:cNvSpPr txBox="1"/>
+          <p:nvPr/>
+        </p:nvSpPr>
+        <p:spPr>
+          <a:xfrm>
+            <a:off x="658368" y="3520440"/>
+            <a:ext cx="3249168" cy="256032"/>
+          </a:xfrm>
+          <a:prstGeom prst="rect">
+            <a:avLst/>
+          </a:prstGeom>
+          <a:noFill/>
+        </p:spPr>
+        <p:txBody>
+          <a:bodyPr wrap="square" anchor="t"/>
+          <a:lstStyle/>
+          <a:p>
+            <a:pPr algn="l"/>
+            <a:r>
+              <a:rPr sz="1100" b="1" i="0" a:ea="Calibri">
+                <a:solidFill>
+                  <a:srgbClr val="475569"/>
+                </a:solidFill>
+                <a:latin typeface="Calibri"/>
+              </a:rPr>
+              <a:t>Write a full-sentence answer</a:t>
+            </a:r>
+          </a:p>
+        </p:txBody>
+      </p:sp>
+      <p:sp>
+        <p:nvSpPr>
+          <p:cNvPr id="12" name="Rectangle 11"/>
+          <p:cNvSpPr/>
+          <p:nvPr/>
+        </p:nvSpPr>
+        <p:spPr>
+          <a:xfrm>
+            <a:off x="658368" y="3858768"/>
+            <a:ext cx="3249168" cy="15875"/>
+          </a:xfrm>
+          <a:prstGeom prst="rect">
+            <a:avLst/>
+          </a:prstGeom>
+          <a:solidFill>
+            <a:srgbClr val="E2E8F0"/>
+          </a:solidFill>
+          <a:ln>
+            <a:noFill/>
+          </a:ln>
+        </p:spPr>
+        <p:style>
+          <a:lnRef idx="1">
+            <a:schemeClr val="accent1"/>
+          </a:lnRef>
+          <a:fillRef idx="3">
+            <a:schemeClr val="accent1"/>
+          </a:fillRef>
+          <a:effectRef idx="2">
+            <a:schemeClr val="accent1"/>
+          </a:effectRef>
+          <a:fontRef idx="minor">
+            <a:schemeClr val="lt1"/>
+          </a:fontRef>
+        </p:style>
+        <p:txBody>
+          <a:bodyPr rtlCol="0" anchor="ctr"/>
+          <a:lstStyle/>
+          <a:p>
+            <a:pPr algn="ctr"/>
+          </a:p>
+        </p:txBody>
+      </p:sp>
+      <p:sp>
+        <p:nvSpPr>
+          <p:cNvPr id="13" name="Rectangle 12"/>
+          <p:cNvSpPr/>
+          <p:nvPr/>
+        </p:nvSpPr>
+        <p:spPr>
+          <a:xfrm>
+            <a:off x="658368" y="4151376"/>
+            <a:ext cx="3249168" cy="15875"/>
+          </a:xfrm>
+          <a:prstGeom prst="rect">
+            <a:avLst/>
+          </a:prstGeom>
+          <a:solidFill>
+            <a:srgbClr val="E2E8F0"/>
+          </a:solidFill>
+          <a:ln>
+            <a:noFill/>
+          </a:ln>
+        </p:spPr>
+        <p:style>
+          <a:lnRef idx="1">
+            <a:schemeClr val="accent1"/>
+          </a:lnRef>
+          <a:fillRef idx="3">
+            <a:schemeClr val="accent1"/>
+          </a:fillRef>
+          <a:effectRef idx="2">
+            <a:schemeClr val="accent1"/>
+          </a:effectRef>
+          <a:fontRef idx="minor">
+            <a:schemeClr val="lt1"/>
+          </a:fontRef>
+        </p:style>
+        <p:txBody>
+          <a:bodyPr rtlCol="0" anchor="ctr"/>
+          <a:lstStyle/>
+          <a:p>
+            <a:pPr algn="ctr"/>
+          </a:p>
+        </p:txBody>
+      </p:sp>
+      <p:sp>
+        <p:nvSpPr>
+          <p:cNvPr id="14" name="Rectangle 13"/>
+          <p:cNvSpPr/>
+          <p:nvPr/>
+        </p:nvSpPr>
+        <p:spPr>
+          <a:xfrm>
+            <a:off x="658368" y="4443984"/>
+            <a:ext cx="3249168" cy="15875"/>
+          </a:xfrm>
+          <a:prstGeom prst="rect">
+            <a:avLst/>
+          </a:prstGeom>
+          <a:solidFill>
+            <a:srgbClr val="E2E8F0"/>
+          </a:solidFill>
+          <a:ln>
+            <a:noFill/>
+          </a:ln>
+        </p:spPr>
+        <p:style>
+          <a:lnRef idx="1">
+            <a:schemeClr val="accent1"/>
+          </a:lnRef>
+          <a:fillRef idx="3">
+            <a:schemeClr val="accent1"/>
+          </a:fillRef>
+          <a:effectRef idx="2">
+            <a:schemeClr val="accent1"/>
+          </a:effectRef>
+          <a:fontRef idx="minor">
+            <a:schemeClr val="lt1"/>
+          </a:fontRef>
+        </p:style>
+        <p:txBody>
+          <a:bodyPr rtlCol="0" anchor="ctr"/>
+          <a:lstStyle/>
+          <a:p>
+            <a:pPr algn="ctr"/>
+          </a:p>
+        </p:txBody>
+      </p:sp>
+      <p:sp>
+        <p:nvSpPr>
+          <p:cNvPr id="15" name="Rectangle 14"/>
+          <p:cNvSpPr/>
+          <p:nvPr/>
+        </p:nvSpPr>
+        <p:spPr>
+          <a:xfrm>
+            <a:off x="658368" y="4736592"/>
+            <a:ext cx="3249168" cy="15875"/>
+          </a:xfrm>
+          <a:prstGeom prst="rect">
+            <a:avLst/>
+          </a:prstGeom>
+          <a:solidFill>
+            <a:srgbClr val="E2E8F0"/>
+          </a:solidFill>
+          <a:ln>
+            <a:noFill/>
+          </a:ln>
+        </p:spPr>
+        <p:style>
+          <a:lnRef idx="1">
+            <a:schemeClr val="accent1"/>
+          </a:lnRef>
+          <a:fillRef idx="3">
+            <a:schemeClr val="accent1"/>
+          </a:fillRef>
+          <a:effectRef idx="2">
+            <a:schemeClr val="accent1"/>
+          </a:effectRef>
+          <a:fontRef idx="minor">
+            <a:schemeClr val="lt1"/>
+          </a:fontRef>
+        </p:style>
+        <p:txBody>
+          <a:bodyPr rtlCol="0" anchor="ctr"/>
+          <a:lstStyle/>
+          <a:p>
+            <a:pPr algn="ctr"/>
+          </a:p>
+        </p:txBody>
+      </p:sp>
+      <p:sp>
+        <p:nvSpPr>
+          <p:cNvPr id="16" name="Rounded Rectangle 15"/>
           <p:cNvSpPr/>
           <p:nvPr/>
         </p:nvSpPr>
@@ -12792,7 +13453,7 @@
       </p:sp>
       <p:sp>
         <p:nvSpPr>
-          <p:cNvPr id="12" name="Rounded Rectangle 11"/>
+          <p:cNvPr id="17" name="Rounded Rectangle 16"/>
           <p:cNvSpPr/>
           <p:nvPr/>
         </p:nvSpPr>
@@ -12835,7 +13496,7 @@
       </p:sp>
       <p:sp>
         <p:nvSpPr>
-          <p:cNvPr id="13" name="TextBox 12"/>
+          <p:cNvPr id="18" name="TextBox 17"/>
           <p:cNvSpPr txBox="1"/>
           <p:nvPr/>
         </p:nvSpPr>
@@ -12868,7 +13529,7 @@
       </p:sp>
       <p:sp>
         <p:nvSpPr>
-          <p:cNvPr id="14" name="TextBox 13"/>
+          <p:cNvPr id="19" name="TextBox 18"/>
           <p:cNvSpPr txBox="1"/>
           <p:nvPr/>
         </p:nvSpPr>
@@ -12901,14 +13562,14 @@
       </p:sp>
       <p:sp>
         <p:nvSpPr>
-          <p:cNvPr id="15" name="TextBox 14"/>
+          <p:cNvPr id="20" name="TextBox 19"/>
           <p:cNvSpPr txBox="1"/>
           <p:nvPr/>
         </p:nvSpPr>
         <p:spPr>
           <a:xfrm>
             <a:off x="4456176" y="2011680"/>
-            <a:ext cx="3249168" cy="3383280"/>
+            <a:ext cx="3249168" cy="1417320"/>
           </a:xfrm>
           <a:prstGeom prst="rect">
             <a:avLst/>
@@ -12934,7 +13595,212 @@
       </p:sp>
       <p:sp>
         <p:nvSpPr>
-          <p:cNvPr id="16" name="Rounded Rectangle 15"/>
+          <p:cNvPr id="21" name="TextBox 20"/>
+          <p:cNvSpPr txBox="1"/>
+          <p:nvPr/>
+        </p:nvSpPr>
+        <p:spPr>
+          <a:xfrm>
+            <a:off x="4456176" y="3520440"/>
+            <a:ext cx="3249168" cy="256032"/>
+          </a:xfrm>
+          <a:prstGeom prst="rect">
+            <a:avLst/>
+          </a:prstGeom>
+          <a:noFill/>
+        </p:spPr>
+        <p:txBody>
+          <a:bodyPr wrap="square" anchor="t"/>
+          <a:lstStyle/>
+          <a:p>
+            <a:pPr algn="l"/>
+            <a:r>
+              <a:rPr sz="1100" b="1" i="0" a:ea="Calibri">
+                <a:solidFill>
+                  <a:srgbClr val="475569"/>
+                </a:solidFill>
+                <a:latin typeface="Calibri"/>
+              </a:rPr>
+              <a:t>Write a full-sentence answer</a:t>
+            </a:r>
+          </a:p>
+        </p:txBody>
+      </p:sp>
+      <p:sp>
+        <p:nvSpPr>
+          <p:cNvPr id="22" name="Rectangle 21"/>
+          <p:cNvSpPr/>
+          <p:nvPr/>
+        </p:nvSpPr>
+        <p:spPr>
+          <a:xfrm>
+            <a:off x="4456176" y="3858768"/>
+            <a:ext cx="3249168" cy="15875"/>
+          </a:xfrm>
+          <a:prstGeom prst="rect">
+            <a:avLst/>
+          </a:prstGeom>
+          <a:solidFill>
+            <a:srgbClr val="E2E8F0"/>
+          </a:solidFill>
+          <a:ln>
+            <a:noFill/>
+          </a:ln>
+        </p:spPr>
+        <p:style>
+          <a:lnRef idx="1">
+            <a:schemeClr val="accent1"/>
+          </a:lnRef>
+          <a:fillRef idx="3">
+            <a:schemeClr val="accent1"/>
+          </a:fillRef>
+          <a:effectRef idx="2">
+            <a:schemeClr val="accent1"/>
+          </a:effectRef>
+          <a:fontRef idx="minor">
+            <a:schemeClr val="lt1"/>
+          </a:fontRef>
+        </p:style>
+        <p:txBody>
+          <a:bodyPr rtlCol="0" anchor="ctr"/>
+          <a:lstStyle/>
+          <a:p>
+            <a:pPr algn="ctr"/>
+          </a:p>
+        </p:txBody>
+      </p:sp>
+      <p:sp>
+        <p:nvSpPr>
+          <p:cNvPr id="23" name="Rectangle 22"/>
+          <p:cNvSpPr/>
+          <p:nvPr/>
+        </p:nvSpPr>
+        <p:spPr>
+          <a:xfrm>
+            <a:off x="4456176" y="4151376"/>
+            <a:ext cx="3249168" cy="15875"/>
+          </a:xfrm>
+          <a:prstGeom prst="rect">
+            <a:avLst/>
+          </a:prstGeom>
+          <a:solidFill>
+            <a:srgbClr val="E2E8F0"/>
+          </a:solidFill>
+          <a:ln>
+            <a:noFill/>
+          </a:ln>
+        </p:spPr>
+        <p:style>
+          <a:lnRef idx="1">
+            <a:schemeClr val="accent1"/>
+          </a:lnRef>
+          <a:fillRef idx="3">
+            <a:schemeClr val="accent1"/>
+          </a:fillRef>
+          <a:effectRef idx="2">
+            <a:schemeClr val="accent1"/>
+          </a:effectRef>
+          <a:fontRef idx="minor">
+            <a:schemeClr val="lt1"/>
+          </a:fontRef>
+        </p:style>
+        <p:txBody>
+          <a:bodyPr rtlCol="0" anchor="ctr"/>
+          <a:lstStyle/>
+          <a:p>
+            <a:pPr algn="ctr"/>
+          </a:p>
+        </p:txBody>
+      </p:sp>
+      <p:sp>
+        <p:nvSpPr>
+          <p:cNvPr id="24" name="Rectangle 23"/>
+          <p:cNvSpPr/>
+          <p:nvPr/>
+        </p:nvSpPr>
+        <p:spPr>
+          <a:xfrm>
+            <a:off x="4456176" y="4443984"/>
+            <a:ext cx="3249168" cy="15875"/>
+          </a:xfrm>
+          <a:prstGeom prst="rect">
+            <a:avLst/>
+          </a:prstGeom>
+          <a:solidFill>
+            <a:srgbClr val="E2E8F0"/>
+          </a:solidFill>
+          <a:ln>
+            <a:noFill/>
+          </a:ln>
+        </p:spPr>
+        <p:style>
+          <a:lnRef idx="1">
+            <a:schemeClr val="accent1"/>
+          </a:lnRef>
+          <a:fillRef idx="3">
+            <a:schemeClr val="accent1"/>
+          </a:fillRef>
+          <a:effectRef idx="2">
+            <a:schemeClr val="accent1"/>
+          </a:effectRef>
+          <a:fontRef idx="minor">
+            <a:schemeClr val="lt1"/>
+          </a:fontRef>
+        </p:style>
+        <p:txBody>
+          <a:bodyPr rtlCol="0" anchor="ctr"/>
+          <a:lstStyle/>
+          <a:p>
+            <a:pPr algn="ctr"/>
+          </a:p>
+        </p:txBody>
+      </p:sp>
+      <p:sp>
+        <p:nvSpPr>
+          <p:cNvPr id="25" name="Rectangle 24"/>
+          <p:cNvSpPr/>
+          <p:nvPr/>
+        </p:nvSpPr>
+        <p:spPr>
+          <a:xfrm>
+            <a:off x="4456176" y="4736592"/>
+            <a:ext cx="3249168" cy="15875"/>
+          </a:xfrm>
+          <a:prstGeom prst="rect">
+            <a:avLst/>
+          </a:prstGeom>
+          <a:solidFill>
+            <a:srgbClr val="E2E8F0"/>
+          </a:solidFill>
+          <a:ln>
+            <a:noFill/>
+          </a:ln>
+        </p:spPr>
+        <p:style>
+          <a:lnRef idx="1">
+            <a:schemeClr val="accent1"/>
+          </a:lnRef>
+          <a:fillRef idx="3">
+            <a:schemeClr val="accent1"/>
+          </a:fillRef>
+          <a:effectRef idx="2">
+            <a:schemeClr val="accent1"/>
+          </a:effectRef>
+          <a:fontRef idx="minor">
+            <a:schemeClr val="lt1"/>
+          </a:fontRef>
+        </p:style>
+        <p:txBody>
+          <a:bodyPr rtlCol="0" anchor="ctr"/>
+          <a:lstStyle/>
+          <a:p>
+            <a:pPr algn="ctr"/>
+          </a:p>
+        </p:txBody>
+      </p:sp>
+      <p:sp>
+        <p:nvSpPr>
+          <p:cNvPr id="26" name="Rounded Rectangle 25"/>
           <p:cNvSpPr/>
           <p:nvPr/>
         </p:nvSpPr>
@@ -12977,7 +13843,7 @@
       </p:sp>
       <p:sp>
         <p:nvSpPr>
-          <p:cNvPr id="17" name="Rounded Rectangle 16"/>
+          <p:cNvPr id="27" name="Rounded Rectangle 26"/>
           <p:cNvSpPr/>
           <p:nvPr/>
         </p:nvSpPr>
@@ -13020,7 +13886,7 @@
       </p:sp>
       <p:sp>
         <p:nvSpPr>
-          <p:cNvPr id="18" name="TextBox 17"/>
+          <p:cNvPr id="28" name="TextBox 27"/>
           <p:cNvSpPr txBox="1"/>
           <p:nvPr/>
         </p:nvSpPr>
@@ -13053,7 +13919,7 @@
       </p:sp>
       <p:sp>
         <p:nvSpPr>
-          <p:cNvPr id="19" name="TextBox 18"/>
+          <p:cNvPr id="29" name="TextBox 28"/>
           <p:cNvSpPr txBox="1"/>
           <p:nvPr/>
         </p:nvSpPr>
@@ -13086,14 +13952,14 @@
       </p:sp>
       <p:sp>
         <p:nvSpPr>
-          <p:cNvPr id="20" name="TextBox 19"/>
+          <p:cNvPr id="30" name="TextBox 29"/>
           <p:cNvSpPr txBox="1"/>
           <p:nvPr/>
         </p:nvSpPr>
         <p:spPr>
           <a:xfrm>
             <a:off x="8253984" y="2011680"/>
-            <a:ext cx="3249168" cy="3383280"/>
+            <a:ext cx="3249168" cy="1417320"/>
           </a:xfrm>
           <a:prstGeom prst="rect">
             <a:avLst/>
@@ -13155,7 +14021,212 @@
       </p:sp>
       <p:sp>
         <p:nvSpPr>
-          <p:cNvPr id="21" name="TextBox 20"/>
+          <p:cNvPr id="31" name="TextBox 30"/>
+          <p:cNvSpPr txBox="1"/>
+          <p:nvPr/>
+        </p:nvSpPr>
+        <p:spPr>
+          <a:xfrm>
+            <a:off x="8253984" y="3520440"/>
+            <a:ext cx="3249168" cy="256032"/>
+          </a:xfrm>
+          <a:prstGeom prst="rect">
+            <a:avLst/>
+          </a:prstGeom>
+          <a:noFill/>
+        </p:spPr>
+        <p:txBody>
+          <a:bodyPr wrap="square" anchor="t"/>
+          <a:lstStyle/>
+          <a:p>
+            <a:pPr algn="l"/>
+            <a:r>
+              <a:rPr sz="1100" b="1" i="0" a:ea="Calibri">
+                <a:solidFill>
+                  <a:srgbClr val="475569"/>
+                </a:solidFill>
+                <a:latin typeface="Calibri"/>
+              </a:rPr>
+              <a:t>Write a full-sentence answer</a:t>
+            </a:r>
+          </a:p>
+        </p:txBody>
+      </p:sp>
+      <p:sp>
+        <p:nvSpPr>
+          <p:cNvPr id="32" name="Rectangle 31"/>
+          <p:cNvSpPr/>
+          <p:nvPr/>
+        </p:nvSpPr>
+        <p:spPr>
+          <a:xfrm>
+            <a:off x="8253984" y="3858768"/>
+            <a:ext cx="3249168" cy="15875"/>
+          </a:xfrm>
+          <a:prstGeom prst="rect">
+            <a:avLst/>
+          </a:prstGeom>
+          <a:solidFill>
+            <a:srgbClr val="E2E8F0"/>
+          </a:solidFill>
+          <a:ln>
+            <a:noFill/>
+          </a:ln>
+        </p:spPr>
+        <p:style>
+          <a:lnRef idx="1">
+            <a:schemeClr val="accent1"/>
+          </a:lnRef>
+          <a:fillRef idx="3">
+            <a:schemeClr val="accent1"/>
+          </a:fillRef>
+          <a:effectRef idx="2">
+            <a:schemeClr val="accent1"/>
+          </a:effectRef>
+          <a:fontRef idx="minor">
+            <a:schemeClr val="lt1"/>
+          </a:fontRef>
+        </p:style>
+        <p:txBody>
+          <a:bodyPr rtlCol="0" anchor="ctr"/>
+          <a:lstStyle/>
+          <a:p>
+            <a:pPr algn="ctr"/>
+          </a:p>
+        </p:txBody>
+      </p:sp>
+      <p:sp>
+        <p:nvSpPr>
+          <p:cNvPr id="33" name="Rectangle 32"/>
+          <p:cNvSpPr/>
+          <p:nvPr/>
+        </p:nvSpPr>
+        <p:spPr>
+          <a:xfrm>
+            <a:off x="8253984" y="4151376"/>
+            <a:ext cx="3249168" cy="15875"/>
+          </a:xfrm>
+          <a:prstGeom prst="rect">
+            <a:avLst/>
+          </a:prstGeom>
+          <a:solidFill>
+            <a:srgbClr val="E2E8F0"/>
+          </a:solidFill>
+          <a:ln>
+            <a:noFill/>
+          </a:ln>
+        </p:spPr>
+        <p:style>
+          <a:lnRef idx="1">
+            <a:schemeClr val="accent1"/>
+          </a:lnRef>
+          <a:fillRef idx="3">
+            <a:schemeClr val="accent1"/>
+          </a:fillRef>
+          <a:effectRef idx="2">
+            <a:schemeClr val="accent1"/>
+          </a:effectRef>
+          <a:fontRef idx="minor">
+            <a:schemeClr val="lt1"/>
+          </a:fontRef>
+        </p:style>
+        <p:txBody>
+          <a:bodyPr rtlCol="0" anchor="ctr"/>
+          <a:lstStyle/>
+          <a:p>
+            <a:pPr algn="ctr"/>
+          </a:p>
+        </p:txBody>
+      </p:sp>
+      <p:sp>
+        <p:nvSpPr>
+          <p:cNvPr id="34" name="Rectangle 33"/>
+          <p:cNvSpPr/>
+          <p:nvPr/>
+        </p:nvSpPr>
+        <p:spPr>
+          <a:xfrm>
+            <a:off x="8253984" y="4443984"/>
+            <a:ext cx="3249168" cy="15875"/>
+          </a:xfrm>
+          <a:prstGeom prst="rect">
+            <a:avLst/>
+          </a:prstGeom>
+          <a:solidFill>
+            <a:srgbClr val="E2E8F0"/>
+          </a:solidFill>
+          <a:ln>
+            <a:noFill/>
+          </a:ln>
+        </p:spPr>
+        <p:style>
+          <a:lnRef idx="1">
+            <a:schemeClr val="accent1"/>
+          </a:lnRef>
+          <a:fillRef idx="3">
+            <a:schemeClr val="accent1"/>
+          </a:fillRef>
+          <a:effectRef idx="2">
+            <a:schemeClr val="accent1"/>
+          </a:effectRef>
+          <a:fontRef idx="minor">
+            <a:schemeClr val="lt1"/>
+          </a:fontRef>
+        </p:style>
+        <p:txBody>
+          <a:bodyPr rtlCol="0" anchor="ctr"/>
+          <a:lstStyle/>
+          <a:p>
+            <a:pPr algn="ctr"/>
+          </a:p>
+        </p:txBody>
+      </p:sp>
+      <p:sp>
+        <p:nvSpPr>
+          <p:cNvPr id="35" name="Rectangle 34"/>
+          <p:cNvSpPr/>
+          <p:nvPr/>
+        </p:nvSpPr>
+        <p:spPr>
+          <a:xfrm>
+            <a:off x="8253984" y="4736592"/>
+            <a:ext cx="3249168" cy="15875"/>
+          </a:xfrm>
+          <a:prstGeom prst="rect">
+            <a:avLst/>
+          </a:prstGeom>
+          <a:solidFill>
+            <a:srgbClr val="E2E8F0"/>
+          </a:solidFill>
+          <a:ln>
+            <a:noFill/>
+          </a:ln>
+        </p:spPr>
+        <p:style>
+          <a:lnRef idx="1">
+            <a:schemeClr val="accent1"/>
+          </a:lnRef>
+          <a:fillRef idx="3">
+            <a:schemeClr val="accent1"/>
+          </a:fillRef>
+          <a:effectRef idx="2">
+            <a:schemeClr val="accent1"/>
+          </a:effectRef>
+          <a:fontRef idx="minor">
+            <a:schemeClr val="lt1"/>
+          </a:fontRef>
+        </p:style>
+        <p:txBody>
+          <a:bodyPr rtlCol="0" anchor="ctr"/>
+          <a:lstStyle/>
+          <a:p>
+            <a:pPr algn="ctr"/>
+          </a:p>
+        </p:txBody>
+      </p:sp>
+      <p:sp>
+        <p:nvSpPr>
+          <p:cNvPr id="36" name="TextBox 35"/>
           <p:cNvSpPr txBox="1"/>
           <p:nvPr/>
         </p:nvSpPr>
@@ -13188,7 +14259,7 @@
       </p:sp>
       <p:sp>
         <p:nvSpPr>
-          <p:cNvPr id="22" name="Rectangle 21"/>
+          <p:cNvPr id="37" name="Rectangle 36"/>
           <p:cNvSpPr/>
           <p:nvPr/>
         </p:nvSpPr>
@@ -13231,7 +14302,7 @@
       </p:sp>
       <p:pic>
         <p:nvPicPr>
-          <p:cNvPr id="23" name="Picture 22" descr="jdscience-footer-logo.png"/>
+          <p:cNvPr id="38" name="Picture 37" descr="jdscience-footer-logo.png"/>
           <p:cNvPicPr>
             <a:picLocks noChangeAspect="1"/>
           </p:cNvPicPr>
@@ -13255,7 +14326,7 @@
       </p:pic>
       <p:sp>
         <p:nvSpPr>
-          <p:cNvPr id="24" name="TextBox 23"/>
+          <p:cNvPr id="39" name="TextBox 38"/>
           <p:cNvSpPr txBox="1"/>
           <p:nvPr/>
         </p:nvSpPr>
@@ -13288,7 +14359,7 @@
       </p:sp>
       <p:sp>
         <p:nvSpPr>
-          <p:cNvPr id="25" name="TextBox 24"/>
+          <p:cNvPr id="40" name="TextBox 39"/>
           <p:cNvSpPr txBox="1"/>
           <p:nvPr/>
         </p:nvSpPr>
@@ -13321,7 +14392,7 @@
       </p:sp>
       <p:sp>
         <p:nvSpPr>
-          <p:cNvPr id="26" name="TextBox 25"/>
+          <p:cNvPr id="41" name="TextBox 40"/>
           <p:cNvSpPr txBox="1"/>
           <p:nvPr/>
         </p:nvSpPr>
@@ -19637,8 +20708,8 @@
         </p:nvSpPr>
         <p:spPr>
           <a:xfrm>
-            <a:off x="0" y="2880360"/>
-            <a:ext cx="12191695" cy="73152"/>
+            <a:off x="0" y="0"/>
+            <a:ext cx="146304" cy="6858000"/>
           </a:xfrm>
           <a:prstGeom prst="rect">
             <a:avLst/>
@@ -19680,8 +20751,160 @@
         </p:nvSpPr>
         <p:spPr>
           <a:xfrm>
+            <a:off x="640080" y="384048"/>
+            <a:ext cx="10972800" cy="868680"/>
+          </a:xfrm>
+          <a:prstGeom prst="rect">
+            <a:avLst/>
+          </a:prstGeom>
+          <a:noFill/>
+        </p:spPr>
+        <p:txBody>
+          <a:bodyPr wrap="square" anchor="t"/>
+          <a:lstStyle/>
+          <a:p>
+            <a:pPr algn="l"/>
+            <a:r>
+              <a:rPr sz="3000" b="1" i="0" a:ea="Calibri">
+                <a:solidFill>
+                  <a:srgbClr val="FFFFFF"/>
+                </a:solidFill>
+                <a:latin typeface="Calibri"/>
+              </a:rPr>
+              <a:t>What ionic bonding is</a:t>
+            </a:r>
+          </a:p>
+        </p:txBody>
+      </p:sp>
+      <p:sp>
+        <p:nvSpPr>
+          <p:cNvPr id="5" name="TextBox 4"/>
+          <p:cNvSpPr txBox="1"/>
+          <p:nvPr/>
+        </p:nvSpPr>
+        <p:spPr>
+          <a:xfrm>
+            <a:off x="640080" y="1261872"/>
+            <a:ext cx="10972800" cy="502920"/>
+          </a:xfrm>
+          <a:prstGeom prst="rect">
+            <a:avLst/>
+          </a:prstGeom>
+          <a:noFill/>
+        </p:spPr>
+        <p:txBody>
+          <a:bodyPr wrap="square" anchor="t"/>
+          <a:lstStyle/>
+          <a:p>
+            <a:pPr algn="l"/>
+            <a:r>
+              <a:rPr sz="1700" b="0" i="0" a:ea="Calibri">
+                <a:solidFill>
+                  <a:srgbClr val="CCFBF1"/>
+                </a:solidFill>
+                <a:latin typeface="Calibri"/>
+              </a:rPr>
+              <a:t>Transfer, then attraction</a:t>
+            </a:r>
+          </a:p>
+        </p:txBody>
+      </p:sp>
+      <p:sp>
+        <p:nvSpPr>
+          <p:cNvPr id="6" name="Rounded Rectangle 5"/>
+          <p:cNvSpPr/>
+          <p:nvPr/>
+        </p:nvSpPr>
+        <p:spPr>
+          <a:xfrm>
             <a:off x="640080" y="1965960"/>
-            <a:ext cx="10881360" cy="914400"/>
+            <a:ext cx="3520440" cy="3977639"/>
+          </a:xfrm>
+          <a:prstGeom prst="roundRect">
+            <a:avLst/>
+          </a:prstGeom>
+          <a:solidFill>
+            <a:srgbClr val="003D33"/>
+          </a:solidFill>
+          <a:ln>
+            <a:noFill/>
+          </a:ln>
+        </p:spPr>
+        <p:style>
+          <a:lnRef idx="1">
+            <a:schemeClr val="accent1"/>
+          </a:lnRef>
+          <a:fillRef idx="3">
+            <a:schemeClr val="accent1"/>
+          </a:fillRef>
+          <a:effectRef idx="2">
+            <a:schemeClr val="accent1"/>
+          </a:effectRef>
+          <a:fontRef idx="minor">
+            <a:schemeClr val="lt1"/>
+          </a:fontRef>
+        </p:style>
+        <p:txBody>
+          <a:bodyPr rtlCol="0" anchor="ctr"/>
+          <a:lstStyle/>
+          <a:p>
+            <a:pPr algn="ctr"/>
+          </a:p>
+        </p:txBody>
+      </p:sp>
+      <p:sp>
+        <p:nvSpPr>
+          <p:cNvPr id="7" name="Rectangle 6"/>
+          <p:cNvSpPr/>
+          <p:nvPr/>
+        </p:nvSpPr>
+        <p:spPr>
+          <a:xfrm>
+            <a:off x="640080" y="1965960"/>
+            <a:ext cx="3520440" cy="109728"/>
+          </a:xfrm>
+          <a:prstGeom prst="rect">
+            <a:avLst/>
+          </a:prstGeom>
+          <a:solidFill>
+            <a:srgbClr val="009688"/>
+          </a:solidFill>
+          <a:ln>
+            <a:noFill/>
+          </a:ln>
+        </p:spPr>
+        <p:style>
+          <a:lnRef idx="1">
+            <a:schemeClr val="accent1"/>
+          </a:lnRef>
+          <a:fillRef idx="3">
+            <a:schemeClr val="accent1"/>
+          </a:fillRef>
+          <a:effectRef idx="2">
+            <a:schemeClr val="accent1"/>
+          </a:effectRef>
+          <a:fontRef idx="minor">
+            <a:schemeClr val="lt1"/>
+          </a:fontRef>
+        </p:style>
+        <p:txBody>
+          <a:bodyPr rtlCol="0" anchor="ctr"/>
+          <a:lstStyle/>
+          <a:p>
+            <a:pPr algn="ctr"/>
+          </a:p>
+        </p:txBody>
+      </p:sp>
+      <p:sp>
+        <p:nvSpPr>
+          <p:cNvPr id="8" name="TextBox 7"/>
+          <p:cNvSpPr txBox="1"/>
+          <p:nvPr/>
+        </p:nvSpPr>
+        <p:spPr>
+          <a:xfrm>
+            <a:off x="841248" y="2212848"/>
+            <a:ext cx="3108960" cy="457200"/>
           </a:xfrm>
           <a:prstGeom prst="rect">
             <a:avLst/>
@@ -19694,27 +20917,146 @@
           <a:p>
             <a:pPr algn="l"/>
             <a:r>
-              <a:rPr sz="3400" b="1" i="0" a:ea="Calibri">
+              <a:rPr sz="1600" b="1" i="0" a:ea="Calibri">
+                <a:solidFill>
+                  <a:srgbClr val="CCFBF1"/>
+                </a:solidFill>
+                <a:latin typeface="Calibri"/>
+              </a:rPr>
+              <a:t>1   Look for</a:t>
+            </a:r>
+          </a:p>
+        </p:txBody>
+      </p:sp>
+      <p:sp>
+        <p:nvSpPr>
+          <p:cNvPr id="9" name="TextBox 8"/>
+          <p:cNvSpPr txBox="1"/>
+          <p:nvPr/>
+        </p:nvSpPr>
+        <p:spPr>
+          <a:xfrm>
+            <a:off x="841248" y="2788920"/>
+            <a:ext cx="3108960" cy="2880360"/>
+          </a:xfrm>
+          <a:prstGeom prst="rect">
+            <a:avLst/>
+          </a:prstGeom>
+          <a:noFill/>
+        </p:spPr>
+        <p:txBody>
+          <a:bodyPr wrap="square" anchor="t"/>
+          <a:lstStyle/>
+          <a:p>
+            <a:pPr algn="l"/>
+            <a:r>
+              <a:rPr sz="1600" b="0" i="0" a:ea="Calibri">
                 <a:solidFill>
                   <a:srgbClr val="FFFFFF"/>
                 </a:solidFill>
                 <a:latin typeface="Calibri"/>
               </a:rPr>
-              <a:t>What ionic bonding is</a:t>
-            </a:r>
-          </a:p>
-        </p:txBody>
-      </p:sp>
-      <p:sp>
-        <p:nvSpPr>
-          <p:cNvPr id="5" name="TextBox 4"/>
-          <p:cNvSpPr txBox="1"/>
-          <p:nvPr/>
-        </p:nvSpPr>
-        <p:spPr>
-          <a:xfrm>
-            <a:off x="640080" y="3154680"/>
-            <a:ext cx="10881360" cy="822960"/>
+              <a:t>A metal losing electrons and a non-metal gaining them.</a:t>
+            </a:r>
+          </a:p>
+        </p:txBody>
+      </p:sp>
+      <p:sp>
+        <p:nvSpPr>
+          <p:cNvPr id="10" name="Rounded Rectangle 9"/>
+          <p:cNvSpPr/>
+          <p:nvPr/>
+        </p:nvSpPr>
+        <p:spPr>
+          <a:xfrm>
+            <a:off x="4343400" y="1965960"/>
+            <a:ext cx="3520440" cy="3977639"/>
+          </a:xfrm>
+          <a:prstGeom prst="roundRect">
+            <a:avLst/>
+          </a:prstGeom>
+          <a:solidFill>
+            <a:srgbClr val="003D33"/>
+          </a:solidFill>
+          <a:ln>
+            <a:noFill/>
+          </a:ln>
+        </p:spPr>
+        <p:style>
+          <a:lnRef idx="1">
+            <a:schemeClr val="accent1"/>
+          </a:lnRef>
+          <a:fillRef idx="3">
+            <a:schemeClr val="accent1"/>
+          </a:fillRef>
+          <a:effectRef idx="2">
+            <a:schemeClr val="accent1"/>
+          </a:effectRef>
+          <a:fontRef idx="minor">
+            <a:schemeClr val="lt1"/>
+          </a:fontRef>
+        </p:style>
+        <p:txBody>
+          <a:bodyPr rtlCol="0" anchor="ctr"/>
+          <a:lstStyle/>
+          <a:p>
+            <a:pPr algn="ctr"/>
+          </a:p>
+        </p:txBody>
+      </p:sp>
+      <p:sp>
+        <p:nvSpPr>
+          <p:cNvPr id="11" name="Rectangle 10"/>
+          <p:cNvSpPr/>
+          <p:nvPr/>
+        </p:nvSpPr>
+        <p:spPr>
+          <a:xfrm>
+            <a:off x="4343400" y="1965960"/>
+            <a:ext cx="3520440" cy="109728"/>
+          </a:xfrm>
+          <a:prstGeom prst="rect">
+            <a:avLst/>
+          </a:prstGeom>
+          <a:solidFill>
+            <a:srgbClr val="99F6E4"/>
+          </a:solidFill>
+          <a:ln>
+            <a:noFill/>
+          </a:ln>
+        </p:spPr>
+        <p:style>
+          <a:lnRef idx="1">
+            <a:schemeClr val="accent1"/>
+          </a:lnRef>
+          <a:fillRef idx="3">
+            <a:schemeClr val="accent1"/>
+          </a:fillRef>
+          <a:effectRef idx="2">
+            <a:schemeClr val="accent1"/>
+          </a:effectRef>
+          <a:fontRef idx="minor">
+            <a:schemeClr val="lt1"/>
+          </a:fontRef>
+        </p:style>
+        <p:txBody>
+          <a:bodyPr rtlCol="0" anchor="ctr"/>
+          <a:lstStyle/>
+          <a:p>
+            <a:pPr algn="ctr"/>
+          </a:p>
+        </p:txBody>
+      </p:sp>
+      <p:sp>
+        <p:nvSpPr>
+          <p:cNvPr id="12" name="TextBox 11"/>
+          <p:cNvSpPr txBox="1"/>
+          <p:nvPr/>
+        </p:nvSpPr>
+        <p:spPr>
+          <a:xfrm>
+            <a:off x="4544568" y="2212848"/>
+            <a:ext cx="3108960" cy="457200"/>
           </a:xfrm>
           <a:prstGeom prst="rect">
             <a:avLst/>
@@ -19727,20 +21069,205 @@
           <a:p>
             <a:pPr algn="l"/>
             <a:r>
-              <a:rPr sz="1800" b="0" i="0" a:ea="Calibri">
+              <a:rPr sz="1600" b="1" i="0" a:ea="Calibri">
                 <a:solidFill>
                   <a:srgbClr val="CCFBF1"/>
                 </a:solidFill>
                 <a:latin typeface="Calibri"/>
               </a:rPr>
-              <a:t>Transfer, then attraction</a:t>
-            </a:r>
-          </a:p>
-        </p:txBody>
-      </p:sp>
-      <p:sp>
-        <p:nvSpPr>
-          <p:cNvPr id="6" name="Rectangle 5"/>
+              <a:t>2   Say in full</a:t>
+            </a:r>
+          </a:p>
+        </p:txBody>
+      </p:sp>
+      <p:sp>
+        <p:nvSpPr>
+          <p:cNvPr id="13" name="TextBox 12"/>
+          <p:cNvSpPr txBox="1"/>
+          <p:nvPr/>
+        </p:nvSpPr>
+        <p:spPr>
+          <a:xfrm>
+            <a:off x="4544568" y="2788920"/>
+            <a:ext cx="3108960" cy="2880360"/>
+          </a:xfrm>
+          <a:prstGeom prst="rect">
+            <a:avLst/>
+          </a:prstGeom>
+          <a:noFill/>
+        </p:spPr>
+        <p:txBody>
+          <a:bodyPr wrap="square" anchor="t"/>
+          <a:lstStyle/>
+          <a:p>
+            <a:pPr algn="l"/>
+            <a:r>
+              <a:rPr sz="1600" b="0" i="0" a:ea="Calibri">
+                <a:solidFill>
+                  <a:srgbClr val="FFFFFF"/>
+                </a:solidFill>
+                <a:latin typeface="Calibri"/>
+              </a:rPr>
+              <a:t>Ionic bonding is electrostatic attraction between oppositely charged ions.</a:t>
+            </a:r>
+          </a:p>
+        </p:txBody>
+      </p:sp>
+      <p:sp>
+        <p:nvSpPr>
+          <p:cNvPr id="14" name="Rounded Rectangle 13"/>
+          <p:cNvSpPr/>
+          <p:nvPr/>
+        </p:nvSpPr>
+        <p:spPr>
+          <a:xfrm>
+            <a:off x="8046720" y="1965960"/>
+            <a:ext cx="3520440" cy="3977639"/>
+          </a:xfrm>
+          <a:prstGeom prst="roundRect">
+            <a:avLst/>
+          </a:prstGeom>
+          <a:solidFill>
+            <a:srgbClr val="003D33"/>
+          </a:solidFill>
+          <a:ln>
+            <a:noFill/>
+          </a:ln>
+        </p:spPr>
+        <p:style>
+          <a:lnRef idx="1">
+            <a:schemeClr val="accent1"/>
+          </a:lnRef>
+          <a:fillRef idx="3">
+            <a:schemeClr val="accent1"/>
+          </a:fillRef>
+          <a:effectRef idx="2">
+            <a:schemeClr val="accent1"/>
+          </a:effectRef>
+          <a:fontRef idx="minor">
+            <a:schemeClr val="lt1"/>
+          </a:fontRef>
+        </p:style>
+        <p:txBody>
+          <a:bodyPr rtlCol="0" anchor="ctr"/>
+          <a:lstStyle/>
+          <a:p>
+            <a:pPr algn="ctr"/>
+          </a:p>
+        </p:txBody>
+      </p:sp>
+      <p:sp>
+        <p:nvSpPr>
+          <p:cNvPr id="15" name="Rectangle 14"/>
+          <p:cNvSpPr/>
+          <p:nvPr/>
+        </p:nvSpPr>
+        <p:spPr>
+          <a:xfrm>
+            <a:off x="8046720" y="1965960"/>
+            <a:ext cx="3520440" cy="109728"/>
+          </a:xfrm>
+          <a:prstGeom prst="rect">
+            <a:avLst/>
+          </a:prstGeom>
+          <a:solidFill>
+            <a:srgbClr val="5EEAD4"/>
+          </a:solidFill>
+          <a:ln>
+            <a:noFill/>
+          </a:ln>
+        </p:spPr>
+        <p:style>
+          <a:lnRef idx="1">
+            <a:schemeClr val="accent1"/>
+          </a:lnRef>
+          <a:fillRef idx="3">
+            <a:schemeClr val="accent1"/>
+          </a:fillRef>
+          <a:effectRef idx="2">
+            <a:schemeClr val="accent1"/>
+          </a:effectRef>
+          <a:fontRef idx="minor">
+            <a:schemeClr val="lt1"/>
+          </a:fontRef>
+        </p:style>
+        <p:txBody>
+          <a:bodyPr rtlCol="0" anchor="ctr"/>
+          <a:lstStyle/>
+          <a:p>
+            <a:pPr algn="ctr"/>
+          </a:p>
+        </p:txBody>
+      </p:sp>
+      <p:sp>
+        <p:nvSpPr>
+          <p:cNvPr id="16" name="TextBox 15"/>
+          <p:cNvSpPr txBox="1"/>
+          <p:nvPr/>
+        </p:nvSpPr>
+        <p:spPr>
+          <a:xfrm>
+            <a:off x="8247888" y="2212848"/>
+            <a:ext cx="3108960" cy="457200"/>
+          </a:xfrm>
+          <a:prstGeom prst="rect">
+            <a:avLst/>
+          </a:prstGeom>
+          <a:noFill/>
+        </p:spPr>
+        <p:txBody>
+          <a:bodyPr wrap="square" anchor="t"/>
+          <a:lstStyle/>
+          <a:p>
+            <a:pPr algn="l"/>
+            <a:r>
+              <a:rPr sz="1600" b="1" i="0" a:ea="Calibri">
+                <a:solidFill>
+                  <a:srgbClr val="CCFBF1"/>
+                </a:solidFill>
+                <a:latin typeface="Calibri"/>
+              </a:rPr>
+              <a:t>3   Level 3 move</a:t>
+            </a:r>
+          </a:p>
+        </p:txBody>
+      </p:sp>
+      <p:sp>
+        <p:nvSpPr>
+          <p:cNvPr id="17" name="TextBox 16"/>
+          <p:cNvSpPr txBox="1"/>
+          <p:nvPr/>
+        </p:nvSpPr>
+        <p:spPr>
+          <a:xfrm>
+            <a:off x="8247888" y="2788920"/>
+            <a:ext cx="3108960" cy="2880360"/>
+          </a:xfrm>
+          <a:prstGeom prst="rect">
+            <a:avLst/>
+          </a:prstGeom>
+          <a:noFill/>
+        </p:spPr>
+        <p:txBody>
+          <a:bodyPr wrap="square" anchor="t"/>
+          <a:lstStyle/>
+          <a:p>
+            <a:pPr algn="l"/>
+            <a:r>
+              <a:rPr sz="1600" b="0" i="0" a:ea="Calibri">
+                <a:solidFill>
+                  <a:srgbClr val="FFFFFF"/>
+                </a:solidFill>
+                <a:latin typeface="Calibri"/>
+              </a:rPr>
+              <a:t>Name the ions, the transfer and the giant lattice — not just ‘they share’.</a:t>
+            </a:r>
+          </a:p>
+        </p:txBody>
+      </p:sp>
+      <p:sp>
+        <p:nvSpPr>
+          <p:cNvPr id="18" name="Rectangle 17"/>
           <p:cNvSpPr/>
           <p:nvPr/>
         </p:nvSpPr>
@@ -19783,7 +21310,7 @@
       </p:sp>
       <p:pic>
         <p:nvPicPr>
-          <p:cNvPr id="7" name="Picture 6" descr="jdscience-footer-logo.png"/>
+          <p:cNvPr id="19" name="Picture 18" descr="jdscience-footer-logo.png"/>
           <p:cNvPicPr>
             <a:picLocks noChangeAspect="1"/>
           </p:cNvPicPr>
@@ -19807,7 +21334,7 @@
       </p:pic>
       <p:sp>
         <p:nvSpPr>
-          <p:cNvPr id="8" name="TextBox 7"/>
+          <p:cNvPr id="20" name="TextBox 19"/>
           <p:cNvSpPr txBox="1"/>
           <p:nvPr/>
         </p:nvSpPr>
@@ -19840,7 +21367,7 @@
       </p:sp>
       <p:sp>
         <p:nvSpPr>
-          <p:cNvPr id="9" name="TextBox 8"/>
+          <p:cNvPr id="21" name="TextBox 20"/>
           <p:cNvSpPr txBox="1"/>
           <p:nvPr/>
         </p:nvSpPr>
@@ -19873,7 +21400,7 @@
       </p:sp>
       <p:sp>
         <p:nvSpPr>
-          <p:cNvPr id="10" name="TextBox 9"/>
+          <p:cNvPr id="22" name="TextBox 21"/>
           <p:cNvSpPr txBox="1"/>
           <p:nvPr/>
         </p:nvSpPr>
@@ -20984,8 +22511,8 @@
         </p:nvSpPr>
         <p:spPr>
           <a:xfrm>
-            <a:off x="6931152" y="1069848"/>
-            <a:ext cx="4617720" cy="685800"/>
+            <a:off x="6931152" y="1051560"/>
+            <a:ext cx="4617720" cy="722376"/>
           </a:xfrm>
           <a:prstGeom prst="rect">
             <a:avLst/>
@@ -21121,8 +22648,8 @@
         </p:nvSpPr>
         <p:spPr>
           <a:xfrm>
-            <a:off x="6931152" y="2029968"/>
-            <a:ext cx="4617720" cy="685800"/>
+            <a:off x="6931152" y="2011680"/>
+            <a:ext cx="4617720" cy="722376"/>
           </a:xfrm>
           <a:prstGeom prst="rect">
             <a:avLst/>
@@ -21258,8 +22785,8 @@
         </p:nvSpPr>
         <p:spPr>
           <a:xfrm>
-            <a:off x="6931152" y="2990088"/>
-            <a:ext cx="4617720" cy="685800"/>
+            <a:off x="6931152" y="2971800"/>
+            <a:ext cx="4617720" cy="722376"/>
           </a:xfrm>
           <a:prstGeom prst="rect">
             <a:avLst/>
@@ -21377,8 +22904,8 @@
         </p:nvSpPr>
         <p:spPr>
           <a:xfrm>
-            <a:off x="6931152" y="3950208"/>
-            <a:ext cx="4617720" cy="685800"/>
+            <a:off x="6931152" y="3931920"/>
+            <a:ext cx="4617720" cy="722376"/>
           </a:xfrm>
           <a:prstGeom prst="rect">
             <a:avLst/>
@@ -21496,8 +23023,8 @@
         </p:nvSpPr>
         <p:spPr>
           <a:xfrm>
-            <a:off x="6931152" y="4910328"/>
-            <a:ext cx="4617720" cy="685800"/>
+            <a:off x="6931152" y="4892040"/>
+            <a:ext cx="4617720" cy="722376"/>
           </a:xfrm>
           <a:prstGeom prst="rect">
             <a:avLst/>
